--- a/Linguagens e Tecnicas de Prog/Slides/07 - Matrizes.pptx
+++ b/Linguagens e Tecnicas de Prog/Slides/07 - Matrizes.pptx
@@ -207,7 +207,7 @@
           <a:p>
             <a:fld id="{6ED03497-8374-466E-85FA-95E1138D8F6E}" type="datetimeFigureOut">
               <a:rPr lang="pt-BR" smtClean="0"/>
-              <a:t>06/10/2026</a:t>
+              <a:t>13/10/2026</a:t>
             </a:fld>
             <a:endParaRPr lang="pt-BR"/>
           </a:p>
@@ -1701,7 +1701,7 @@
           <a:p>
             <a:fld id="{A87E3B6E-8316-4A1C-BADA-DB7F3456EEF1}" type="datetimeFigureOut">
               <a:rPr lang="pt-BR" smtClean="0"/>
-              <a:t>06/10/2026</a:t>
+              <a:t>13/10/2026</a:t>
             </a:fld>
             <a:endParaRPr lang="pt-BR"/>
           </a:p>
@@ -1899,7 +1899,7 @@
           <a:p>
             <a:fld id="{A87E3B6E-8316-4A1C-BADA-DB7F3456EEF1}" type="datetimeFigureOut">
               <a:rPr lang="pt-BR" smtClean="0"/>
-              <a:t>06/10/2026</a:t>
+              <a:t>13/10/2026</a:t>
             </a:fld>
             <a:endParaRPr lang="pt-BR"/>
           </a:p>
@@ -2107,7 +2107,7 @@
           <a:p>
             <a:fld id="{A87E3B6E-8316-4A1C-BADA-DB7F3456EEF1}" type="datetimeFigureOut">
               <a:rPr lang="pt-BR" smtClean="0"/>
-              <a:t>06/10/2026</a:t>
+              <a:t>13/10/2026</a:t>
             </a:fld>
             <a:endParaRPr lang="pt-BR"/>
           </a:p>
@@ -2343,7 +2343,7 @@
           <a:p>
             <a:fld id="{A87E3B6E-8316-4A1C-BADA-DB7F3456EEF1}" type="datetimeFigureOut">
               <a:rPr lang="pt-BR" smtClean="0"/>
-              <a:t>06/10/2026</a:t>
+              <a:t>13/10/2026</a:t>
             </a:fld>
             <a:endParaRPr lang="pt-BR"/>
           </a:p>
@@ -2513,7 +2513,7 @@
           <a:p>
             <a:fld id="{A87E3B6E-8316-4A1C-BADA-DB7F3456EEF1}" type="datetimeFigureOut">
               <a:rPr lang="pt-BR" smtClean="0"/>
-              <a:t>06/10/2026</a:t>
+              <a:t>13/10/2026</a:t>
             </a:fld>
             <a:endParaRPr lang="pt-BR"/>
           </a:p>
@@ -2781,7 +2781,7 @@
           <a:p>
             <a:fld id="{A87E3B6E-8316-4A1C-BADA-DB7F3456EEF1}" type="datetimeFigureOut">
               <a:rPr lang="pt-BR" smtClean="0"/>
-              <a:t>06/10/2026</a:t>
+              <a:t>13/10/2026</a:t>
             </a:fld>
             <a:endParaRPr lang="pt-BR"/>
           </a:p>
@@ -3013,7 +3013,7 @@
           <a:p>
             <a:fld id="{A87E3B6E-8316-4A1C-BADA-DB7F3456EEF1}" type="datetimeFigureOut">
               <a:rPr lang="pt-BR" smtClean="0"/>
-              <a:t>06/10/2026</a:t>
+              <a:t>13/10/2026</a:t>
             </a:fld>
             <a:endParaRPr lang="pt-BR"/>
           </a:p>
@@ -3368,7 +3368,7 @@
           <a:p>
             <a:fld id="{A87E3B6E-8316-4A1C-BADA-DB7F3456EEF1}" type="datetimeFigureOut">
               <a:rPr lang="pt-BR" smtClean="0"/>
-              <a:t>06/10/2026</a:t>
+              <a:t>13/10/2026</a:t>
             </a:fld>
             <a:endParaRPr lang="pt-BR"/>
           </a:p>
@@ -3509,7 +3509,7 @@
           <a:p>
             <a:fld id="{A87E3B6E-8316-4A1C-BADA-DB7F3456EEF1}" type="datetimeFigureOut">
               <a:rPr lang="pt-BR" smtClean="0"/>
-              <a:t>06/10/2026</a:t>
+              <a:t>13/10/2026</a:t>
             </a:fld>
             <a:endParaRPr lang="pt-BR"/>
           </a:p>
@@ -3604,7 +3604,7 @@
           <a:p>
             <a:fld id="{A87E3B6E-8316-4A1C-BADA-DB7F3456EEF1}" type="datetimeFigureOut">
               <a:rPr lang="pt-BR" smtClean="0"/>
-              <a:t>06/10/2026</a:t>
+              <a:t>13/10/2026</a:t>
             </a:fld>
             <a:endParaRPr lang="pt-BR"/>
           </a:p>
@@ -3961,7 +3961,7 @@
           <a:p>
             <a:fld id="{A87E3B6E-8316-4A1C-BADA-DB7F3456EEF1}" type="datetimeFigureOut">
               <a:rPr lang="pt-BR" smtClean="0"/>
-              <a:t>06/10/2026</a:t>
+              <a:t>13/10/2026</a:t>
             </a:fld>
             <a:endParaRPr lang="pt-BR"/>
           </a:p>
@@ -4162,7 +4162,7 @@
           <a:p>
             <a:fld id="{A87E3B6E-8316-4A1C-BADA-DB7F3456EEF1}" type="datetimeFigureOut">
               <a:rPr lang="pt-BR" smtClean="0"/>
-              <a:t>06/10/2026</a:t>
+              <a:t>13/10/2026</a:t>
             </a:fld>
             <a:endParaRPr lang="pt-BR"/>
           </a:p>
@@ -4515,7 +4515,7 @@
           <a:p>
             <a:fld id="{A87E3B6E-8316-4A1C-BADA-DB7F3456EEF1}" type="datetimeFigureOut">
               <a:rPr lang="pt-BR" smtClean="0"/>
-              <a:t>06/10/2026</a:t>
+              <a:t>13/10/2026</a:t>
             </a:fld>
             <a:endParaRPr lang="pt-BR"/>
           </a:p>
@@ -4700,7 +4700,7 @@
           <a:p>
             <a:fld id="{A87E3B6E-8316-4A1C-BADA-DB7F3456EEF1}" type="datetimeFigureOut">
               <a:rPr lang="pt-BR" smtClean="0"/>
-              <a:t>06/10/2026</a:t>
+              <a:t>13/10/2026</a:t>
             </a:fld>
             <a:endParaRPr lang="pt-BR"/>
           </a:p>
@@ -4880,7 +4880,7 @@
           <a:p>
             <a:fld id="{A87E3B6E-8316-4A1C-BADA-DB7F3456EEF1}" type="datetimeFigureOut">
               <a:rPr lang="pt-BR" smtClean="0"/>
-              <a:t>06/10/2026</a:t>
+              <a:t>13/10/2026</a:t>
             </a:fld>
             <a:endParaRPr lang="pt-BR"/>
           </a:p>
@@ -5143,7 +5143,7 @@
           <a:p>
             <a:fld id="{A87E3B6E-8316-4A1C-BADA-DB7F3456EEF1}" type="datetimeFigureOut">
               <a:rPr lang="pt-BR" smtClean="0"/>
-              <a:t>06/10/2026</a:t>
+              <a:t>13/10/2026</a:t>
             </a:fld>
             <a:endParaRPr lang="pt-BR"/>
           </a:p>
@@ -5408,7 +5408,7 @@
           <a:p>
             <a:fld id="{A87E3B6E-8316-4A1C-BADA-DB7F3456EEF1}" type="datetimeFigureOut">
               <a:rPr lang="pt-BR" smtClean="0"/>
-              <a:t>06/10/2026</a:t>
+              <a:t>13/10/2026</a:t>
             </a:fld>
             <a:endParaRPr lang="pt-BR"/>
           </a:p>
@@ -5820,7 +5820,7 @@
           <a:p>
             <a:fld id="{A87E3B6E-8316-4A1C-BADA-DB7F3456EEF1}" type="datetimeFigureOut">
               <a:rPr lang="pt-BR" smtClean="0"/>
-              <a:t>06/10/2026</a:t>
+              <a:t>13/10/2026</a:t>
             </a:fld>
             <a:endParaRPr lang="pt-BR"/>
           </a:p>
@@ -5961,7 +5961,7 @@
           <a:p>
             <a:fld id="{A87E3B6E-8316-4A1C-BADA-DB7F3456EEF1}" type="datetimeFigureOut">
               <a:rPr lang="pt-BR" smtClean="0"/>
-              <a:t>06/10/2026</a:t>
+              <a:t>13/10/2026</a:t>
             </a:fld>
             <a:endParaRPr lang="pt-BR"/>
           </a:p>
@@ -6074,7 +6074,7 @@
           <a:p>
             <a:fld id="{A87E3B6E-8316-4A1C-BADA-DB7F3456EEF1}" type="datetimeFigureOut">
               <a:rPr lang="pt-BR" smtClean="0"/>
-              <a:t>06/10/2026</a:t>
+              <a:t>13/10/2026</a:t>
             </a:fld>
             <a:endParaRPr lang="pt-BR"/>
           </a:p>
@@ -6385,7 +6385,7 @@
           <a:p>
             <a:fld id="{A87E3B6E-8316-4A1C-BADA-DB7F3456EEF1}" type="datetimeFigureOut">
               <a:rPr lang="pt-BR" smtClean="0"/>
-              <a:t>06/10/2026</a:t>
+              <a:t>13/10/2026</a:t>
             </a:fld>
             <a:endParaRPr lang="pt-BR"/>
           </a:p>
@@ -6673,7 +6673,7 @@
           <a:p>
             <a:fld id="{A87E3B6E-8316-4A1C-BADA-DB7F3456EEF1}" type="datetimeFigureOut">
               <a:rPr lang="pt-BR" smtClean="0"/>
-              <a:t>06/10/2026</a:t>
+              <a:t>13/10/2026</a:t>
             </a:fld>
             <a:endParaRPr lang="pt-BR"/>
           </a:p>
@@ -6914,7 +6914,7 @@
           <a:p>
             <a:fld id="{A87E3B6E-8316-4A1C-BADA-DB7F3456EEF1}" type="datetimeFigureOut">
               <a:rPr lang="pt-BR" smtClean="0"/>
-              <a:t>06/10/2026</a:t>
+              <a:t>13/10/2026</a:t>
             </a:fld>
             <a:endParaRPr lang="pt-BR"/>
           </a:p>
@@ -7478,7 +7478,7 @@
           <a:p>
             <a:fld id="{A87E3B6E-8316-4A1C-BADA-DB7F3456EEF1}" type="datetimeFigureOut">
               <a:rPr lang="pt-BR" smtClean="0"/>
-              <a:t>06/10/2026</a:t>
+              <a:t>13/10/2026</a:t>
             </a:fld>
             <a:endParaRPr lang="pt-BR"/>
           </a:p>
@@ -8723,8 +8723,8 @@
           </a:p>
         </p:txBody>
       </p:sp>
-      <mc:AlternateContent xmlns:mc="http://schemas.openxmlformats.org/markup-compatibility/2006">
-        <mc:Choice xmlns:a14="http://schemas.microsoft.com/office/drawing/2010/main" Requires="a14">
+      <mc:AlternateContent xmlns:mc="http://schemas.openxmlformats.org/markup-compatibility/2006" xmlns:a14="http://schemas.microsoft.com/office/drawing/2010/main">
+        <mc:Choice Requires="a14">
           <p:sp>
             <p:nvSpPr>
               <p:cNvPr id="3" name="Espaço Reservado para Conteúdo 5">
@@ -9129,7 +9129,7 @@
             </p:txBody>
           </p:sp>
         </mc:Choice>
-        <mc:Fallback>
+        <mc:Fallback xmlns="">
           <p:sp>
             <p:nvSpPr>
               <p:cNvPr id="3" name="Espaço Reservado para Conteúdo 5">
@@ -9377,8 +9377,8 @@
           </a:p>
         </p:txBody>
       </p:sp>
-      <mc:AlternateContent xmlns:mc="http://schemas.openxmlformats.org/markup-compatibility/2006">
-        <mc:Choice xmlns:a14="http://schemas.microsoft.com/office/drawing/2010/main" Requires="a14">
+      <mc:AlternateContent xmlns:mc="http://schemas.openxmlformats.org/markup-compatibility/2006" xmlns:a14="http://schemas.microsoft.com/office/drawing/2010/main">
+        <mc:Choice Requires="a14">
           <p:sp>
             <p:nvSpPr>
               <p:cNvPr id="3" name="Espaço Reservado para Conteúdo 5">
@@ -9695,7 +9695,7 @@
             </p:txBody>
           </p:sp>
         </mc:Choice>
-        <mc:Fallback>
+        <mc:Fallback xmlns="">
           <p:sp>
             <p:nvSpPr>
               <p:cNvPr id="3" name="Espaço Reservado para Conteúdo 5">
